--- a/2 ACT AW - Bluetooth.pptx
+++ b/2 ACT AW - Bluetooth.pptx
@@ -264,7 +264,7 @@
           <a:p>
             <a:fld id="{2FC2648E-2733-4EC8-BEDA-1577DE2D3D01}" type="datetimeFigureOut">
               <a:rPr lang="en-US" smtClean="0"/>
-              <a:t>10/16/2026</a:t>
+              <a:t>10/19/2026</a:t>
             </a:fld>
             <a:endParaRPr lang="en-US"/>
           </a:p>
@@ -2237,7 +2237,7 @@
           <a:p>
             <a:fld id="{8CF61943-3342-4554-8403-118C8C1529D5}" type="datetimeFigureOut">
               <a:rPr lang="en-US" smtClean="0"/>
-              <a:t>10/16/2026</a:t>
+              <a:t>10/19/2026</a:t>
             </a:fld>
             <a:endParaRPr lang="en-US"/>
           </a:p>
@@ -2600,7 +2600,7 @@
           <a:p>
             <a:fld id="{8CF61943-3342-4554-8403-118C8C1529D5}" type="datetimeFigureOut">
               <a:rPr lang="en-US" smtClean="0"/>
-              <a:t>10/16/2026</a:t>
+              <a:t>10/19/2026</a:t>
             </a:fld>
             <a:endParaRPr lang="en-US"/>
           </a:p>
@@ -5021,7 +5021,7 @@
               <a:t>Security </a:t>
             </a:r>
             <a:r>
-              <a:rPr kumimoji="0" sz="3600" b="1" i="0" u="none" strike="noStrike" kern="0" cap="none" spc="-75" normalizeH="0" baseline="0" noProof="0" dirty="0">
+              <a:rPr kumimoji="0" lang="en-US" sz="3600" b="1" i="0" u="none" strike="noStrike" kern="0" cap="none" spc="-75" normalizeH="0" baseline="0" noProof="0" dirty="0">
                 <a:ln>
                   <a:noFill/>
                 </a:ln>
@@ -5035,58 +5035,7 @@
                 <a:ea typeface="Calibri" panose="020F0502020204030204" pitchFamily="34" charset="0"/>
                 <a:cs typeface="Calibri" panose="020F0502020204030204" pitchFamily="34" charset="0"/>
               </a:rPr>
-              <a:t>Hands-</a:t>
-            </a:r>
-            <a:r>
-              <a:rPr kumimoji="0" sz="3600" b="1" i="0" u="none" strike="noStrike" kern="0" cap="none" spc="0" normalizeH="0" baseline="0" noProof="0" dirty="0">
-                <a:ln>
-                  <a:noFill/>
-                </a:ln>
-                <a:solidFill>
-                  <a:srgbClr val="252525"/>
-                </a:solidFill>
-                <a:effectLst/>
-                <a:uLnTx/>
-                <a:uFillTx/>
-                <a:latin typeface="Calibri" panose="020F0502020204030204" pitchFamily="34" charset="0"/>
-                <a:ea typeface="Calibri" panose="020F0502020204030204" pitchFamily="34" charset="0"/>
-                <a:cs typeface="Calibri" panose="020F0502020204030204" pitchFamily="34" charset="0"/>
-              </a:rPr>
-              <a:t>on</a:t>
-            </a:r>
-            <a:r>
-              <a:rPr kumimoji="0" sz="3600" b="1" i="0" u="none" strike="noStrike" kern="0" cap="none" spc="-195" normalizeH="0" baseline="0" noProof="0" dirty="0">
-                <a:ln>
-                  <a:noFill/>
-                </a:ln>
-                <a:solidFill>
-                  <a:srgbClr val="252525"/>
-                </a:solidFill>
-                <a:effectLst/>
-                <a:uLnTx/>
-                <a:uFillTx/>
-                <a:latin typeface="Calibri" panose="020F0502020204030204" pitchFamily="34" charset="0"/>
-                <a:ea typeface="Calibri" panose="020F0502020204030204" pitchFamily="34" charset="0"/>
-                <a:cs typeface="Calibri" panose="020F0502020204030204" pitchFamily="34" charset="0"/>
-              </a:rPr>
-              <a:t> </a:t>
-            </a:r>
-            <a:r>
-              <a:rPr kumimoji="0" sz="3600" b="1" i="0" u="none" strike="noStrike" kern="0" cap="none" spc="-65" normalizeH="0" baseline="0" noProof="0" dirty="0">
-                <a:ln>
-                  <a:noFill/>
-                </a:ln>
-                <a:solidFill>
-                  <a:srgbClr val="252525"/>
-                </a:solidFill>
-                <a:effectLst/>
-                <a:uLnTx/>
-                <a:uFillTx/>
-                <a:latin typeface="Calibri" panose="020F0502020204030204" pitchFamily="34" charset="0"/>
-                <a:ea typeface="Calibri" panose="020F0502020204030204" pitchFamily="34" charset="0"/>
-                <a:cs typeface="Calibri" panose="020F0502020204030204" pitchFamily="34" charset="0"/>
-              </a:rPr>
-              <a:t>Exercises</a:t>
+              <a:t>Windows PC</a:t>
             </a:r>
             <a:endParaRPr kumimoji="0" sz="3600" b="1" i="0" u="none" strike="noStrike" kern="0" cap="none" spc="0" normalizeH="0" baseline="0" noProof="0" dirty="0">
               <a:ln>
@@ -5341,7 +5290,7 @@
               <a:t>Security </a:t>
             </a:r>
             <a:r>
-              <a:rPr kumimoji="0" sz="3600" b="1" i="0" u="none" strike="noStrike" kern="0" cap="none" spc="-75" normalizeH="0" baseline="0" noProof="0" dirty="0">
+              <a:rPr kumimoji="0" lang="en-US" sz="3600" b="1" i="0" u="none" strike="noStrike" kern="0" cap="none" spc="-75" normalizeH="0" baseline="0" noProof="0" dirty="0">
                 <a:ln>
                   <a:noFill/>
                 </a:ln>
@@ -5355,58 +5304,7 @@
                 <a:ea typeface="Calibri" panose="020F0502020204030204" pitchFamily="34" charset="0"/>
                 <a:cs typeface="Calibri" panose="020F0502020204030204" pitchFamily="34" charset="0"/>
               </a:rPr>
-              <a:t>Hands-</a:t>
-            </a:r>
-            <a:r>
-              <a:rPr kumimoji="0" sz="3600" b="1" i="0" u="none" strike="noStrike" kern="0" cap="none" spc="0" normalizeH="0" baseline="0" noProof="0" dirty="0">
-                <a:ln>
-                  <a:noFill/>
-                </a:ln>
-                <a:solidFill>
-                  <a:srgbClr val="252525"/>
-                </a:solidFill>
-                <a:effectLst/>
-                <a:uLnTx/>
-                <a:uFillTx/>
-                <a:latin typeface="Calibri" panose="020F0502020204030204" pitchFamily="34" charset="0"/>
-                <a:ea typeface="Calibri" panose="020F0502020204030204" pitchFamily="34" charset="0"/>
-                <a:cs typeface="Calibri" panose="020F0502020204030204" pitchFamily="34" charset="0"/>
-              </a:rPr>
-              <a:t>on</a:t>
-            </a:r>
-            <a:r>
-              <a:rPr kumimoji="0" sz="3600" b="1" i="0" u="none" strike="noStrike" kern="0" cap="none" spc="-195" normalizeH="0" baseline="0" noProof="0" dirty="0">
-                <a:ln>
-                  <a:noFill/>
-                </a:ln>
-                <a:solidFill>
-                  <a:srgbClr val="252525"/>
-                </a:solidFill>
-                <a:effectLst/>
-                <a:uLnTx/>
-                <a:uFillTx/>
-                <a:latin typeface="Calibri" panose="020F0502020204030204" pitchFamily="34" charset="0"/>
-                <a:ea typeface="Calibri" panose="020F0502020204030204" pitchFamily="34" charset="0"/>
-                <a:cs typeface="Calibri" panose="020F0502020204030204" pitchFamily="34" charset="0"/>
-              </a:rPr>
-              <a:t> </a:t>
-            </a:r>
-            <a:r>
-              <a:rPr kumimoji="0" sz="3600" b="1" i="0" u="none" strike="noStrike" kern="0" cap="none" spc="-65" normalizeH="0" baseline="0" noProof="0" dirty="0">
-                <a:ln>
-                  <a:noFill/>
-                </a:ln>
-                <a:solidFill>
-                  <a:srgbClr val="252525"/>
-                </a:solidFill>
-                <a:effectLst/>
-                <a:uLnTx/>
-                <a:uFillTx/>
-                <a:latin typeface="Calibri" panose="020F0502020204030204" pitchFamily="34" charset="0"/>
-                <a:ea typeface="Calibri" panose="020F0502020204030204" pitchFamily="34" charset="0"/>
-                <a:cs typeface="Calibri" panose="020F0502020204030204" pitchFamily="34" charset="0"/>
-              </a:rPr>
-              <a:t>Exercises</a:t>
+              <a:t>- Android</a:t>
             </a:r>
             <a:endParaRPr kumimoji="0" sz="3600" b="1" i="0" u="none" strike="noStrike" kern="0" cap="none" spc="0" normalizeH="0" baseline="0" noProof="0" dirty="0">
               <a:ln>
@@ -5696,7 +5594,7 @@
               <a:t>Security </a:t>
             </a:r>
             <a:r>
-              <a:rPr kumimoji="0" sz="3600" b="1" i="0" u="none" strike="noStrike" kern="0" cap="none" spc="-75" normalizeH="0" baseline="0" noProof="0" dirty="0">
+              <a:rPr kumimoji="0" lang="en-US" sz="3600" b="1" i="0" u="none" strike="noStrike" kern="0" cap="none" spc="-75" normalizeH="0" baseline="0" noProof="0" dirty="0">
                 <a:ln>
                   <a:noFill/>
                 </a:ln>
@@ -5710,58 +5608,7 @@
                 <a:ea typeface="Calibri" panose="020F0502020204030204" pitchFamily="34" charset="0"/>
                 <a:cs typeface="Calibri" panose="020F0502020204030204" pitchFamily="34" charset="0"/>
               </a:rPr>
-              <a:t>Hands-</a:t>
-            </a:r>
-            <a:r>
-              <a:rPr kumimoji="0" sz="3600" b="1" i="0" u="none" strike="noStrike" kern="0" cap="none" spc="0" normalizeH="0" baseline="0" noProof="0" dirty="0">
-                <a:ln>
-                  <a:noFill/>
-                </a:ln>
-                <a:solidFill>
-                  <a:srgbClr val="252525"/>
-                </a:solidFill>
-                <a:effectLst/>
-                <a:uLnTx/>
-                <a:uFillTx/>
-                <a:latin typeface="Calibri" panose="020F0502020204030204" pitchFamily="34" charset="0"/>
-                <a:ea typeface="Calibri" panose="020F0502020204030204" pitchFamily="34" charset="0"/>
-                <a:cs typeface="Calibri" panose="020F0502020204030204" pitchFamily="34" charset="0"/>
-              </a:rPr>
-              <a:t>on</a:t>
-            </a:r>
-            <a:r>
-              <a:rPr kumimoji="0" sz="3600" b="1" i="0" u="none" strike="noStrike" kern="0" cap="none" spc="-195" normalizeH="0" baseline="0" noProof="0" dirty="0">
-                <a:ln>
-                  <a:noFill/>
-                </a:ln>
-                <a:solidFill>
-                  <a:srgbClr val="252525"/>
-                </a:solidFill>
-                <a:effectLst/>
-                <a:uLnTx/>
-                <a:uFillTx/>
-                <a:latin typeface="Calibri" panose="020F0502020204030204" pitchFamily="34" charset="0"/>
-                <a:ea typeface="Calibri" panose="020F0502020204030204" pitchFamily="34" charset="0"/>
-                <a:cs typeface="Calibri" panose="020F0502020204030204" pitchFamily="34" charset="0"/>
-              </a:rPr>
-              <a:t> </a:t>
-            </a:r>
-            <a:r>
-              <a:rPr kumimoji="0" sz="3600" b="1" i="0" u="none" strike="noStrike" kern="0" cap="none" spc="-65" normalizeH="0" baseline="0" noProof="0" dirty="0">
-                <a:ln>
-                  <a:noFill/>
-                </a:ln>
-                <a:solidFill>
-                  <a:srgbClr val="252525"/>
-                </a:solidFill>
-                <a:effectLst/>
-                <a:uLnTx/>
-                <a:uFillTx/>
-                <a:latin typeface="Calibri" panose="020F0502020204030204" pitchFamily="34" charset="0"/>
-                <a:ea typeface="Calibri" panose="020F0502020204030204" pitchFamily="34" charset="0"/>
-                <a:cs typeface="Calibri" panose="020F0502020204030204" pitchFamily="34" charset="0"/>
-              </a:rPr>
-              <a:t>Exercises</a:t>
+              <a:t>- Apple</a:t>
             </a:r>
             <a:endParaRPr kumimoji="0" sz="3600" b="1" i="0" u="none" strike="noStrike" kern="0" cap="none" spc="0" normalizeH="0" baseline="0" noProof="0" dirty="0">
               <a:ln>
@@ -18842,7 +18689,7 @@
         <p:spPr>
           <a:xfrm>
             <a:off x="-12700" y="1210817"/>
-            <a:ext cx="8030845" cy="4799330"/>
+            <a:ext cx="8030845" cy="5329023"/>
           </a:xfrm>
           <a:prstGeom prst="rect">
             <a:avLst/>
@@ -18919,7 +18766,7 @@
               </a:rPr>
               <a:t>Address</a:t>
             </a:r>
-            <a:endParaRPr kumimoji="0" sz="2800" b="0" i="0" u="none" strike="noStrike" kern="0" cap="none" spc="0" normalizeH="0" baseline="0" noProof="0">
+            <a:endParaRPr kumimoji="0" sz="2800" b="0" i="0" u="none" strike="noStrike" kern="0" cap="none" spc="0" normalizeH="0" baseline="0" noProof="0" dirty="0">
               <a:ln>
                 <a:noFill/>
               </a:ln>
@@ -19051,7 +18898,7 @@
               </a:rPr>
               <a:t>value</a:t>
             </a:r>
-            <a:endParaRPr kumimoji="0" sz="2800" b="0" i="0" u="none" strike="noStrike" kern="0" cap="none" spc="0" normalizeH="0" baseline="0" noProof="0">
+            <a:endParaRPr kumimoji="0" sz="2800" b="0" i="0" u="none" strike="noStrike" kern="0" cap="none" spc="0" normalizeH="0" baseline="0" noProof="0" dirty="0">
               <a:ln>
                 <a:noFill/>
               </a:ln>
@@ -19179,7 +19026,7 @@
               </a:rPr>
               <a:t>DD:EE:FF</a:t>
             </a:r>
-            <a:endParaRPr kumimoji="0" sz="2800" b="0" i="0" u="none" strike="noStrike" kern="0" cap="none" spc="0" normalizeH="0" baseline="0" noProof="0">
+            <a:endParaRPr kumimoji="0" sz="2800" b="0" i="0" u="none" strike="noStrike" kern="0" cap="none" spc="0" normalizeH="0" baseline="0" noProof="0" dirty="0">
               <a:ln>
                 <a:noFill/>
               </a:ln>
@@ -19423,7 +19270,7 @@
               </a:rPr>
               <a:t>(OUI)</a:t>
             </a:r>
-            <a:endParaRPr kumimoji="0" sz="2800" b="0" i="0" u="none" strike="noStrike" kern="0" cap="none" spc="0" normalizeH="0" baseline="0" noProof="0">
+            <a:endParaRPr kumimoji="0" sz="2800" b="0" i="0" u="none" strike="noStrike" kern="0" cap="none" spc="0" normalizeH="0" baseline="0" noProof="0" dirty="0">
               <a:ln>
                 <a:noFill/>
               </a:ln>
@@ -19619,7 +19466,7 @@
               </a:rPr>
               <a:t>Part</a:t>
             </a:r>
-            <a:endParaRPr kumimoji="0" sz="2800" b="0" i="0" u="none" strike="noStrike" kern="0" cap="none" spc="0" normalizeH="0" baseline="0" noProof="0">
+            <a:endParaRPr kumimoji="0" sz="2800" b="0" i="0" u="none" strike="noStrike" kern="0" cap="none" spc="0" normalizeH="0" baseline="0" noProof="0" dirty="0">
               <a:ln>
                 <a:noFill/>
               </a:ln>
@@ -19767,7 +19614,7 @@
               </a:rPr>
               <a:t>Part</a:t>
             </a:r>
-            <a:endParaRPr kumimoji="0" sz="2800" b="0" i="0" u="none" strike="noStrike" kern="0" cap="none" spc="0" normalizeH="0" baseline="0" noProof="0">
+            <a:endParaRPr kumimoji="0" sz="2800" b="0" i="0" u="none" strike="noStrike" kern="0" cap="none" spc="0" normalizeH="0" baseline="0" noProof="0" dirty="0">
               <a:ln>
                 <a:noFill/>
               </a:ln>
@@ -19979,7 +19826,7 @@
               </a:rPr>
               <a:t>Part</a:t>
             </a:r>
-            <a:endParaRPr kumimoji="0" sz="2800" b="0" i="0" u="none" strike="noStrike" kern="0" cap="none" spc="0" normalizeH="0" baseline="0" noProof="0">
+            <a:endParaRPr kumimoji="0" sz="2800" b="0" i="0" u="none" strike="noStrike" kern="0" cap="none" spc="0" normalizeH="0" baseline="0" noProof="0" dirty="0">
               <a:ln>
                 <a:noFill/>
               </a:ln>
@@ -20127,6 +19974,55 @@
               </a:rPr>
               <a:t>discoverable</a:t>
             </a:r>
+            <a:endParaRPr kumimoji="0" lang="en-US" sz="2800" b="0" i="0" u="none" strike="noStrike" kern="0" cap="none" spc="-10" normalizeH="0" baseline="0" noProof="0" dirty="0">
+              <a:ln>
+                <a:noFill/>
+              </a:ln>
+              <a:solidFill>
+                <a:srgbClr val="404040"/>
+              </a:solidFill>
+              <a:effectLst/>
+              <a:uLnTx/>
+              <a:uFillTx/>
+              <a:latin typeface="Calibri"/>
+              <a:cs typeface="Calibri"/>
+            </a:endParaRPr>
+          </a:p>
+          <a:p>
+            <a:pPr marL="396240" indent="-182880">
+              <a:spcBef>
+                <a:spcPts val="265"/>
+              </a:spcBef>
+              <a:buClr>
+                <a:srgbClr val="FFCCFF"/>
+              </a:buClr>
+              <a:buFont typeface="Calibri"/>
+              <a:buChar char="◦"/>
+              <a:tabLst>
+                <a:tab pos="396240" algn="l"/>
+              </a:tabLst>
+              <a:defRPr/>
+            </a:pPr>
+            <a:r>
+              <a:rPr lang="en-US" sz="2800" kern="0" spc="-10">
+                <a:solidFill>
+                  <a:srgbClr val="404040"/>
+                </a:solidFill>
+                <a:latin typeface="Calibri"/>
+                <a:cs typeface="Calibri"/>
+              </a:rPr>
+              <a:t>Look it up here: </a:t>
+            </a:r>
+            <a:r>
+              <a:rPr lang="en-US" sz="2800">
+                <a:hlinkClick r:id="rId3"/>
+              </a:rPr>
+              <a:t>https://maclookup.app/</a:t>
+            </a:r>
+            <a:r>
+              <a:rPr lang="en-US" sz="2800"/>
+              <a:t> </a:t>
+            </a:r>
             <a:endParaRPr kumimoji="0" sz="2800" b="0" i="0" u="none" strike="noStrike" kern="0" cap="none" spc="0" normalizeH="0" baseline="0" noProof="0">
               <a:ln>
                 <a:noFill/>
@@ -20159,7 +20055,7 @@
               <a:tabLst/>
               <a:defRPr/>
             </a:pPr>
-            <a:endParaRPr kumimoji="0" sz="2800" b="0" i="0" u="none" strike="noStrike" kern="0" cap="none" spc="0" normalizeH="0" baseline="0" noProof="0">
+            <a:endParaRPr kumimoji="0" sz="2800" b="0" i="0" u="none" strike="noStrike" kern="0" cap="none" spc="0" normalizeH="0" baseline="0" noProof="0" dirty="0">
               <a:ln>
                 <a:noFill/>
               </a:ln>
@@ -20303,7 +20199,7 @@
               </a:rPr>
               <a:t>manufacturer!</a:t>
             </a:r>
-            <a:endParaRPr kumimoji="0" sz="2800" b="0" i="0" u="none" strike="noStrike" kern="0" cap="none" spc="0" normalizeH="0" baseline="0" noProof="0">
+            <a:endParaRPr kumimoji="0" sz="2800" b="0" i="0" u="none" strike="noStrike" kern="0" cap="none" spc="0" normalizeH="0" baseline="0" noProof="0" dirty="0">
               <a:ln>
                 <a:noFill/>
               </a:ln>
@@ -25164,65 +25060,6 @@
 </file>
 
 <file path=customXml/item2.xml><?xml version="1.0" encoding="utf-8"?>
-<?mso-contentType ?>
-<spe:Receivers xmlns:spe="http://schemas.microsoft.com/sharepoint/events">
-  <Receiver>
-    <Name>Document ID Generator</Name>
-    <Synchronization>Synchronous</Synchronization>
-    <Type>10001</Type>
-    <SequenceNumber>1000</SequenceNumber>
-    <Url/>
-    <Assembly>Microsoft.Office.DocumentManagement, Version=16.0.0.0, Culture=neutral, PublicKeyToken=71e9bce111e9429c</Assembly>
-    <Class>Microsoft.Office.DocumentManagement.Internal.DocIdHandler</Class>
-    <Data/>
-    <Filter/>
-  </Receiver>
-  <Receiver>
-    <Name>Document ID Generator</Name>
-    <Synchronization>Synchronous</Synchronization>
-    <Type>10002</Type>
-    <SequenceNumber>1001</SequenceNumber>
-    <Url/>
-    <Assembly>Microsoft.Office.DocumentManagement, Version=16.0.0.0, Culture=neutral, PublicKeyToken=71e9bce111e9429c</Assembly>
-    <Class>Microsoft.Office.DocumentManagement.Internal.DocIdHandler</Class>
-    <Data/>
-    <Filter/>
-  </Receiver>
-  <Receiver>
-    <Name>Document ID Generator</Name>
-    <Synchronization>Synchronous</Synchronization>
-    <Type>10004</Type>
-    <SequenceNumber>1002</SequenceNumber>
-    <Url/>
-    <Assembly>Microsoft.Office.DocumentManagement, Version=16.0.0.0, Culture=neutral, PublicKeyToken=71e9bce111e9429c</Assembly>
-    <Class>Microsoft.Office.DocumentManagement.Internal.DocIdHandler</Class>
-    <Data/>
-    <Filter/>
-  </Receiver>
-  <Receiver>
-    <Name>Document ID Generator</Name>
-    <Synchronization>Synchronous</Synchronization>
-    <Type>10006</Type>
-    <SequenceNumber>1003</SequenceNumber>
-    <Url/>
-    <Assembly>Microsoft.Office.DocumentManagement, Version=16.0.0.0, Culture=neutral, PublicKeyToken=71e9bce111e9429c</Assembly>
-    <Class>Microsoft.Office.DocumentManagement.Internal.DocIdHandler</Class>
-    <Data/>
-    <Filter/>
-  </Receiver>
-</spe:Receivers>
-</file>
-
-<file path=customXml/item3.xml><?xml version="1.0" encoding="utf-8"?>
-<?mso-contentType ?>
-<FormTemplates xmlns="http://schemas.microsoft.com/sharepoint/v3/contenttype/forms">
-  <Display>DocumentLibraryForm</Display>
-  <Edit>DocumentLibraryForm</Edit>
-  <New>DocumentLibraryForm</New>
-</FormTemplates>
-</file>
-
-<file path=customXml/item4.xml><?xml version="1.0" encoding="utf-8"?>
 <ct:contentTypeSchema xmlns:ct="http://schemas.microsoft.com/office/2006/metadata/contentType" xmlns:ma="http://schemas.microsoft.com/office/2006/metadata/properties/metaAttributes" ct:_="" ma:_="" ma:contentTypeName="Document" ma:contentTypeID="0x01010067B86F8708159745A0B6896184DE9576" ma:contentTypeVersion="19" ma:contentTypeDescription="Create a new document." ma:contentTypeScope="" ma:versionID="493bf26d373952ea1ae3b9e24cd19b33">
   <xsd:schema xmlns:xsd="http://www.w3.org/2001/XMLSchema" xmlns:xs="http://www.w3.org/2001/XMLSchema" xmlns:p="http://schemas.microsoft.com/office/2006/metadata/properties" xmlns:ns2="c7a77415-c4a3-4262-8430-671f3e8707b6" xmlns:ns3="69a7259e-7a2c-42d5-bc84-25eccf0dce8b" targetNamespace="http://schemas.microsoft.com/office/2006/metadata/properties" ma:root="true" ma:fieldsID="69c00e31f84d56e19bb090b7ea67ab52" ns2:_="" ns3:_="">
     <xsd:import namespace="c7a77415-c4a3-4262-8430-671f3e8707b6"/>
@@ -25508,6 +25345,65 @@
 </ct:contentTypeSchema>
 </file>
 
+<file path=customXml/item3.xml><?xml version="1.0" encoding="utf-8"?>
+<?mso-contentType ?>
+<FormTemplates xmlns="http://schemas.microsoft.com/sharepoint/v3/contenttype/forms">
+  <Display>DocumentLibraryForm</Display>
+  <Edit>DocumentLibraryForm</Edit>
+  <New>DocumentLibraryForm</New>
+</FormTemplates>
+</file>
+
+<file path=customXml/item4.xml><?xml version="1.0" encoding="utf-8"?>
+<?mso-contentType ?>
+<spe:Receivers xmlns:spe="http://schemas.microsoft.com/sharepoint/events">
+  <Receiver>
+    <Name>Document ID Generator</Name>
+    <Synchronization>Synchronous</Synchronization>
+    <Type>10001</Type>
+    <SequenceNumber>1000</SequenceNumber>
+    <Url/>
+    <Assembly>Microsoft.Office.DocumentManagement, Version=16.0.0.0, Culture=neutral, PublicKeyToken=71e9bce111e9429c</Assembly>
+    <Class>Microsoft.Office.DocumentManagement.Internal.DocIdHandler</Class>
+    <Data/>
+    <Filter/>
+  </Receiver>
+  <Receiver>
+    <Name>Document ID Generator</Name>
+    <Synchronization>Synchronous</Synchronization>
+    <Type>10002</Type>
+    <SequenceNumber>1001</SequenceNumber>
+    <Url/>
+    <Assembly>Microsoft.Office.DocumentManagement, Version=16.0.0.0, Culture=neutral, PublicKeyToken=71e9bce111e9429c</Assembly>
+    <Class>Microsoft.Office.DocumentManagement.Internal.DocIdHandler</Class>
+    <Data/>
+    <Filter/>
+  </Receiver>
+  <Receiver>
+    <Name>Document ID Generator</Name>
+    <Synchronization>Synchronous</Synchronization>
+    <Type>10004</Type>
+    <SequenceNumber>1002</SequenceNumber>
+    <Url/>
+    <Assembly>Microsoft.Office.DocumentManagement, Version=16.0.0.0, Culture=neutral, PublicKeyToken=71e9bce111e9429c</Assembly>
+    <Class>Microsoft.Office.DocumentManagement.Internal.DocIdHandler</Class>
+    <Data/>
+    <Filter/>
+  </Receiver>
+  <Receiver>
+    <Name>Document ID Generator</Name>
+    <Synchronization>Synchronous</Synchronization>
+    <Type>10006</Type>
+    <SequenceNumber>1003</SequenceNumber>
+    <Url/>
+    <Assembly>Microsoft.Office.DocumentManagement, Version=16.0.0.0, Culture=neutral, PublicKeyToken=71e9bce111e9429c</Assembly>
+    <Class>Microsoft.Office.DocumentManagement.Internal.DocIdHandler</Class>
+    <Data/>
+    <Filter/>
+  </Receiver>
+</spe:Receivers>
+</file>
+
 <file path=customXml/itemProps1.xml><?xml version="1.0" encoding="utf-8"?>
 <ds:datastoreItem xmlns:ds="http://schemas.openxmlformats.org/officeDocument/2006/customXml" ds:itemID="{E71A463F-9F4B-47AC-91AA-3962FD8F3CE5}">
   <ds:schemaRefs>
@@ -25520,22 +25416,6 @@
 </file>
 
 <file path=customXml/itemProps2.xml><?xml version="1.0" encoding="utf-8"?>
-<ds:datastoreItem xmlns:ds="http://schemas.openxmlformats.org/officeDocument/2006/customXml" ds:itemID="{54C592EF-85C1-482B-896B-DED434B6FCCC}">
-  <ds:schemaRefs>
-    <ds:schemaRef ds:uri="http://schemas.microsoft.com/sharepoint/events"/>
-  </ds:schemaRefs>
-</ds:datastoreItem>
-</file>
-
-<file path=customXml/itemProps3.xml><?xml version="1.0" encoding="utf-8"?>
-<ds:datastoreItem xmlns:ds="http://schemas.openxmlformats.org/officeDocument/2006/customXml" ds:itemID="{84EE72F3-C956-4A5B-833F-E761B5D8ACD8}">
-  <ds:schemaRefs>
-    <ds:schemaRef ds:uri="http://schemas.microsoft.com/sharepoint/v3/contenttype/forms"/>
-  </ds:schemaRefs>
-</ds:datastoreItem>
-</file>
-
-<file path=customXml/itemProps4.xml><?xml version="1.0" encoding="utf-8"?>
 <ds:datastoreItem xmlns:ds="http://schemas.openxmlformats.org/officeDocument/2006/customXml" ds:itemID="{8FEF19B7-7529-453B-A7D5-A8465340F17A}">
   <ds:schemaRefs>
     <ds:schemaRef ds:uri="http://schemas.microsoft.com/office/2006/metadata/contentType"/>
@@ -25552,4 +25432,20 @@
     <ds:schemaRef ds:uri="http://schemas.microsoft.com/internal/obd"/>
   </ds:schemaRefs>
 </ds:datastoreItem>
+</file>
+
+<file path=customXml/itemProps3.xml><?xml version="1.0" encoding="utf-8"?>
+<ds:datastoreItem xmlns:ds="http://schemas.openxmlformats.org/officeDocument/2006/customXml" ds:itemID="{84EE72F3-C956-4A5B-833F-E761B5D8ACD8}">
+  <ds:schemaRefs>
+    <ds:schemaRef ds:uri="http://schemas.microsoft.com/sharepoint/v3/contenttype/forms"/>
+  </ds:schemaRefs>
+</ds:datastoreItem>
+</file>
+
+<file path=customXml/itemProps4.xml><?xml version="1.0" encoding="utf-8"?>
+<ds:datastoreItem xmlns:ds="http://schemas.openxmlformats.org/officeDocument/2006/customXml" ds:itemID="{54C592EF-85C1-482B-896B-DED434B6FCCC}">
+  <ds:schemaRefs>
+    <ds:schemaRef ds:uri="http://schemas.microsoft.com/sharepoint/events"/>
+  </ds:schemaRefs>
+</ds:datastoreItem>
 </file>
--- a/2 ACT AW - Bluetooth.pptx
+++ b/2 ACT AW - Bluetooth.pptx
@@ -20004,7 +20004,7 @@
               <a:defRPr/>
             </a:pPr>
             <a:r>
-              <a:rPr lang="en-US" sz="2800" kern="0" spc="-10">
+              <a:rPr lang="en-US" sz="2800" kern="0" spc="-10" dirty="0">
                 <a:solidFill>
                   <a:srgbClr val="404040"/>
                 </a:solidFill>
@@ -20014,16 +20014,16 @@
               <a:t>Look it up here: </a:t>
             </a:r>
             <a:r>
-              <a:rPr lang="en-US" sz="2800">
+              <a:rPr lang="en-US" sz="2800" dirty="0">
                 <a:hlinkClick r:id="rId3"/>
               </a:rPr>
               <a:t>https://maclookup.app/</a:t>
             </a:r>
             <a:r>
-              <a:rPr lang="en-US" sz="2800"/>
+              <a:rPr lang="en-US" sz="2800" dirty="0"/>
               <a:t> </a:t>
             </a:r>
-            <a:endParaRPr kumimoji="0" sz="2800" b="0" i="0" u="none" strike="noStrike" kern="0" cap="none" spc="0" normalizeH="0" baseline="0" noProof="0">
+            <a:endParaRPr kumimoji="0" sz="2800" b="0" i="0" u="none" strike="noStrike" kern="0" cap="none" spc="0" normalizeH="0" baseline="0" noProof="0" dirty="0">
               <a:ln>
                 <a:noFill/>
               </a:ln>
